--- a/BackToHome_ポスター.pptx
+++ b/BackToHome_ポスター.pptx
@@ -104,6 +104,11 @@
       </a:defRPr>
     </a:lvl9pPr>
   </p:defaultTextStyle>
+  <p:extLst>
+    <p:ext uri="{EFAFB233-063F-42B5-8137-9DF3F51BA10A}">
+      <p15:sldGuideLst xmlns:p15="http://schemas.microsoft.com/office/powerpoint/2012/main"/>
+    </p:ext>
+  </p:extLst>
 </p:presentation>
 </file>
 
@@ -238,7 +243,7 @@
           <a:p>
             <a:fld id="{67CFB89A-092E-4A9F-99E5-8971A5611650}" type="datetimeFigureOut">
               <a:rPr kumimoji="1" lang="ja-JP" altLang="en-US" smtClean="0"/>
-              <a:t>2026/1/17</a:t>
+              <a:t>2026/1/19</a:t>
             </a:fld>
             <a:endParaRPr kumimoji="1" lang="ja-JP" altLang="en-US"/>
           </a:p>
@@ -440,7 +445,7 @@
           <a:p>
             <a:fld id="{67CFB89A-092E-4A9F-99E5-8971A5611650}" type="datetimeFigureOut">
               <a:rPr kumimoji="1" lang="ja-JP" altLang="en-US" smtClean="0"/>
-              <a:t>2026/1/17</a:t>
+              <a:t>2026/1/19</a:t>
             </a:fld>
             <a:endParaRPr kumimoji="1" lang="ja-JP" altLang="en-US"/>
           </a:p>
@@ -652,7 +657,7 @@
           <a:p>
             <a:fld id="{67CFB89A-092E-4A9F-99E5-8971A5611650}" type="datetimeFigureOut">
               <a:rPr kumimoji="1" lang="ja-JP" altLang="en-US" smtClean="0"/>
-              <a:t>2026/1/17</a:t>
+              <a:t>2026/1/19</a:t>
             </a:fld>
             <a:endParaRPr kumimoji="1" lang="ja-JP" altLang="en-US"/>
           </a:p>
@@ -854,7 +859,7 @@
           <a:p>
             <a:fld id="{67CFB89A-092E-4A9F-99E5-8971A5611650}" type="datetimeFigureOut">
               <a:rPr kumimoji="1" lang="ja-JP" altLang="en-US" smtClean="0"/>
-              <a:t>2026/1/17</a:t>
+              <a:t>2026/1/19</a:t>
             </a:fld>
             <a:endParaRPr kumimoji="1" lang="ja-JP" altLang="en-US"/>
           </a:p>
@@ -1098,7 +1103,7 @@
           <a:p>
             <a:fld id="{67CFB89A-092E-4A9F-99E5-8971A5611650}" type="datetimeFigureOut">
               <a:rPr kumimoji="1" lang="ja-JP" altLang="en-US" smtClean="0"/>
-              <a:t>2026/1/17</a:t>
+              <a:t>2026/1/19</a:t>
             </a:fld>
             <a:endParaRPr kumimoji="1" lang="ja-JP" altLang="en-US"/>
           </a:p>
@@ -1394,7 +1399,7 @@
           <a:p>
             <a:fld id="{67CFB89A-092E-4A9F-99E5-8971A5611650}" type="datetimeFigureOut">
               <a:rPr kumimoji="1" lang="ja-JP" altLang="en-US" smtClean="0"/>
-              <a:t>2026/1/17</a:t>
+              <a:t>2026/1/19</a:t>
             </a:fld>
             <a:endParaRPr kumimoji="1" lang="ja-JP" altLang="en-US"/>
           </a:p>
@@ -1825,7 +1830,7 @@
           <a:p>
             <a:fld id="{67CFB89A-092E-4A9F-99E5-8971A5611650}" type="datetimeFigureOut">
               <a:rPr kumimoji="1" lang="ja-JP" altLang="en-US" smtClean="0"/>
-              <a:t>2026/1/17</a:t>
+              <a:t>2026/1/19</a:t>
             </a:fld>
             <a:endParaRPr kumimoji="1" lang="ja-JP" altLang="en-US"/>
           </a:p>
@@ -1943,7 +1948,7 @@
           <a:p>
             <a:fld id="{67CFB89A-092E-4A9F-99E5-8971A5611650}" type="datetimeFigureOut">
               <a:rPr kumimoji="1" lang="ja-JP" altLang="en-US" smtClean="0"/>
-              <a:t>2026/1/17</a:t>
+              <a:t>2026/1/19</a:t>
             </a:fld>
             <a:endParaRPr kumimoji="1" lang="ja-JP" altLang="en-US"/>
           </a:p>
@@ -2038,7 +2043,7 @@
           <a:p>
             <a:fld id="{67CFB89A-092E-4A9F-99E5-8971A5611650}" type="datetimeFigureOut">
               <a:rPr kumimoji="1" lang="ja-JP" altLang="en-US" smtClean="0"/>
-              <a:t>2026/1/17</a:t>
+              <a:t>2026/1/19</a:t>
             </a:fld>
             <a:endParaRPr kumimoji="1" lang="ja-JP" altLang="en-US"/>
           </a:p>
@@ -2347,7 +2352,7 @@
           <a:p>
             <a:fld id="{67CFB89A-092E-4A9F-99E5-8971A5611650}" type="datetimeFigureOut">
               <a:rPr kumimoji="1" lang="ja-JP" altLang="en-US" smtClean="0"/>
-              <a:t>2026/1/17</a:t>
+              <a:t>2026/1/19</a:t>
             </a:fld>
             <a:endParaRPr kumimoji="1" lang="ja-JP" altLang="en-US"/>
           </a:p>
@@ -2604,7 +2609,7 @@
           <a:p>
             <a:fld id="{67CFB89A-092E-4A9F-99E5-8971A5611650}" type="datetimeFigureOut">
               <a:rPr kumimoji="1" lang="ja-JP" altLang="en-US" smtClean="0"/>
-              <a:t>2026/1/17</a:t>
+              <a:t>2026/1/19</a:t>
             </a:fld>
             <a:endParaRPr kumimoji="1" lang="ja-JP" altLang="en-US"/>
           </a:p>
@@ -2849,7 +2854,7 @@
           <a:p>
             <a:fld id="{67CFB89A-092E-4A9F-99E5-8971A5611650}" type="datetimeFigureOut">
               <a:rPr kumimoji="1" lang="ja-JP" altLang="en-US" smtClean="0"/>
-              <a:t>2026/1/17</a:t>
+              <a:t>2026/1/19</a:t>
             </a:fld>
             <a:endParaRPr kumimoji="1" lang="ja-JP" altLang="en-US"/>
           </a:p>
@@ -3269,13 +3274,16 @@
         <p:spPr>
           <a:xfrm>
             <a:off x="204961" y="171307"/>
-            <a:ext cx="3237624" cy="2342949"/>
+            <a:ext cx="2297607" cy="2342949"/>
           </a:xfrm>
           <a:prstGeom prst="rect">
             <a:avLst/>
           </a:prstGeom>
           <a:solidFill>
-            <a:schemeClr val="accent5"/>
+            <a:schemeClr val="accent3">
+              <a:lumMod val="60000"/>
+              <a:lumOff val="40000"/>
+            </a:schemeClr>
           </a:solidFill>
         </p:spPr>
         <p:txBody>
@@ -3327,7 +3335,7 @@
           <p:nvPr/>
         </p:nvPicPr>
         <p:blipFill>
-          <a:blip r:embed="rId2">
+          <a:blip r:embed="rId2" cstate="hqprint">
             <a:extLst>
               <a:ext uri="{28A0092B-C50C-407E-A947-70E740481C1C}">
                 <a14:useLocalDpi xmlns:a14="http://schemas.microsoft.com/office/drawing/2010/main" val="0"/>
@@ -3340,8 +3348,8 @@
         </p:blipFill>
         <p:spPr>
           <a:xfrm>
-            <a:off x="4121078" y="1877231"/>
-            <a:ext cx="5587260" cy="2936730"/>
+            <a:off x="2940583" y="177603"/>
+            <a:ext cx="4235116" cy="2338091"/>
           </a:xfrm>
           <a:prstGeom prst="rect">
             <a:avLst/>
@@ -3361,8 +3369,8 @@
           <p:nvPr/>
         </p:nvSpPr>
         <p:spPr>
-          <a:xfrm rot="388138">
-            <a:off x="4838527" y="391685"/>
+          <a:xfrm rot="780986">
+            <a:off x="5525964" y="399184"/>
             <a:ext cx="4300105" cy="1200329"/>
           </a:xfrm>
           <a:prstGeom prst="rect">
@@ -3418,8 +3426,8 @@
         </p:nvSpPr>
         <p:spPr>
           <a:xfrm>
-            <a:off x="4351906" y="5335937"/>
-            <a:ext cx="5125604" cy="792525"/>
+            <a:off x="204961" y="3525144"/>
+            <a:ext cx="4644609" cy="792525"/>
           </a:xfrm>
           <a:prstGeom prst="rect">
             <a:avLst/>
@@ -3495,10 +3503,10 @@
         </p:nvGrpSpPr>
         <p:grpSpPr>
           <a:xfrm>
-            <a:off x="204961" y="3749964"/>
-            <a:ext cx="3822964" cy="2936729"/>
-            <a:chOff x="135228" y="3749964"/>
-            <a:chExt cx="4267436" cy="2936729"/>
+            <a:off x="81395" y="4437247"/>
+            <a:ext cx="3946530" cy="2249446"/>
+            <a:chOff x="-2704" y="3273656"/>
+            <a:chExt cx="4405368" cy="3413037"/>
           </a:xfrm>
         </p:grpSpPr>
         <p:sp>
@@ -3839,8 +3847,8 @@
           </p:nvSpPr>
           <p:spPr>
             <a:xfrm>
-              <a:off x="204961" y="3790950"/>
-              <a:ext cx="2619202" cy="369332"/>
+              <a:off x="-2704" y="3273656"/>
+              <a:ext cx="2619202" cy="369333"/>
             </a:xfrm>
             <a:prstGeom prst="rect">
               <a:avLst/>
@@ -4325,7 +4333,7 @@
         </p:nvSpPr>
         <p:spPr>
           <a:xfrm>
-            <a:off x="4027925" y="6335399"/>
+            <a:off x="4178498" y="6465772"/>
             <a:ext cx="5726374" cy="369332"/>
           </a:xfrm>
           <a:prstGeom prst="rect">
@@ -4369,7 +4377,7 @@
         </p:nvSpPr>
         <p:spPr>
           <a:xfrm>
-            <a:off x="4178498" y="4967668"/>
+            <a:off x="204961" y="3042332"/>
             <a:ext cx="2548447" cy="369332"/>
           </a:xfrm>
           <a:prstGeom prst="rect">
@@ -4387,6 +4395,93 @@
               <a:rPr kumimoji="1" lang="ja-JP" altLang="en-US" b="1" dirty="0"/>
               <a:t>・ゲームの目的</a:t>
             </a:r>
+          </a:p>
+        </p:txBody>
+      </p:sp>
+      <p:pic>
+        <p:nvPicPr>
+          <p:cNvPr id="2" name="図 1"/>
+          <p:cNvPicPr>
+            <a:picLocks noChangeAspect="1"/>
+          </p:cNvPicPr>
+          <p:nvPr/>
+        </p:nvPicPr>
+        <p:blipFill>
+          <a:blip r:embed="rId3"/>
+          <a:stretch>
+            <a:fillRect/>
+          </a:stretch>
+        </p:blipFill>
+        <p:spPr>
+          <a:xfrm>
+            <a:off x="5058141" y="2673721"/>
+            <a:ext cx="3967088" cy="2500840"/>
+          </a:xfrm>
+          <a:prstGeom prst="rect">
+            <a:avLst/>
+          </a:prstGeom>
+        </p:spPr>
+      </p:pic>
+      <p:sp>
+        <p:nvSpPr>
+          <p:cNvPr id="27" name="テキスト ボックス 26">
+            <a:extLst>
+              <a:ext uri="{FF2B5EF4-FFF2-40B4-BE49-F238E27FC236}">
+                <a16:creationId xmlns:a16="http://schemas.microsoft.com/office/drawing/2014/main" id="{373204C4-918B-D641-3662-D6BB541612C3}"/>
+              </a:ext>
+            </a:extLst>
+          </p:cNvPr>
+          <p:cNvSpPr txBox="1"/>
+          <p:nvPr/>
+        </p:nvSpPr>
+        <p:spPr>
+          <a:xfrm>
+            <a:off x="4350288" y="5327119"/>
+            <a:ext cx="4944549" cy="792525"/>
+          </a:xfrm>
+          <a:prstGeom prst="rect">
+            <a:avLst/>
+          </a:prstGeom>
+          <a:noFill/>
+          <a:ln w="38100">
+            <a:solidFill>
+              <a:srgbClr val="00B050"/>
+            </a:solidFill>
+          </a:ln>
+        </p:spPr>
+        <p:style>
+          <a:lnRef idx="0">
+            <a:scrgbClr r="0" g="0" b="0"/>
+          </a:lnRef>
+          <a:fillRef idx="0">
+            <a:scrgbClr r="0" g="0" b="0"/>
+          </a:fillRef>
+          <a:effectRef idx="0">
+            <a:scrgbClr r="0" g="0" b="0"/>
+          </a:effectRef>
+          <a:fontRef idx="minor">
+            <a:schemeClr val="dk1"/>
+          </a:fontRef>
+        </p:style>
+        <p:txBody>
+          <a:bodyPr wrap="square" rtlCol="0">
+            <a:spAutoFit/>
+          </a:bodyPr>
+          <a:lstStyle/>
+          <a:p>
+            <a:r>
+              <a:rPr kumimoji="1" lang="ja-JP" altLang="en-US" sz="2275" dirty="0" smtClean="0"/>
+              <a:t>敵の攻撃を</a:t>
+            </a:r>
+            <a:r>
+              <a:rPr kumimoji="1" lang="ja-JP" altLang="en-US" sz="2275" u="sng" dirty="0" smtClean="0"/>
+              <a:t>なるべく受けずに攻撃する</a:t>
+            </a:r>
+            <a:r>
+              <a:rPr kumimoji="1" lang="ja-JP" altLang="en-US" sz="2275" dirty="0" smtClean="0"/>
+              <a:t>のが攻略の鍵だ。</a:t>
+            </a:r>
+            <a:endParaRPr kumimoji="1" lang="en-US" altLang="ja-JP" sz="2275" dirty="0"/>
           </a:p>
         </p:txBody>
       </p:sp>

--- a/BackToHome_ポスター.pptx
+++ b/BackToHome_ポスター.pptx
@@ -243,7 +243,7 @@
           <a:p>
             <a:fld id="{67CFB89A-092E-4A9F-99E5-8971A5611650}" type="datetimeFigureOut">
               <a:rPr kumimoji="1" lang="ja-JP" altLang="en-US" smtClean="0"/>
-              <a:t>2026/1/19</a:t>
+              <a:t>2026/1/20</a:t>
             </a:fld>
             <a:endParaRPr kumimoji="1" lang="ja-JP" altLang="en-US"/>
           </a:p>
@@ -445,7 +445,7 @@
           <a:p>
             <a:fld id="{67CFB89A-092E-4A9F-99E5-8971A5611650}" type="datetimeFigureOut">
               <a:rPr kumimoji="1" lang="ja-JP" altLang="en-US" smtClean="0"/>
-              <a:t>2026/1/19</a:t>
+              <a:t>2026/1/20</a:t>
             </a:fld>
             <a:endParaRPr kumimoji="1" lang="ja-JP" altLang="en-US"/>
           </a:p>
@@ -657,7 +657,7 @@
           <a:p>
             <a:fld id="{67CFB89A-092E-4A9F-99E5-8971A5611650}" type="datetimeFigureOut">
               <a:rPr kumimoji="1" lang="ja-JP" altLang="en-US" smtClean="0"/>
-              <a:t>2026/1/19</a:t>
+              <a:t>2026/1/20</a:t>
             </a:fld>
             <a:endParaRPr kumimoji="1" lang="ja-JP" altLang="en-US"/>
           </a:p>
@@ -859,7 +859,7 @@
           <a:p>
             <a:fld id="{67CFB89A-092E-4A9F-99E5-8971A5611650}" type="datetimeFigureOut">
               <a:rPr kumimoji="1" lang="ja-JP" altLang="en-US" smtClean="0"/>
-              <a:t>2026/1/19</a:t>
+              <a:t>2026/1/20</a:t>
             </a:fld>
             <a:endParaRPr kumimoji="1" lang="ja-JP" altLang="en-US"/>
           </a:p>
@@ -1103,7 +1103,7 @@
           <a:p>
             <a:fld id="{67CFB89A-092E-4A9F-99E5-8971A5611650}" type="datetimeFigureOut">
               <a:rPr kumimoji="1" lang="ja-JP" altLang="en-US" smtClean="0"/>
-              <a:t>2026/1/19</a:t>
+              <a:t>2026/1/20</a:t>
             </a:fld>
             <a:endParaRPr kumimoji="1" lang="ja-JP" altLang="en-US"/>
           </a:p>
@@ -1399,7 +1399,7 @@
           <a:p>
             <a:fld id="{67CFB89A-092E-4A9F-99E5-8971A5611650}" type="datetimeFigureOut">
               <a:rPr kumimoji="1" lang="ja-JP" altLang="en-US" smtClean="0"/>
-              <a:t>2026/1/19</a:t>
+              <a:t>2026/1/20</a:t>
             </a:fld>
             <a:endParaRPr kumimoji="1" lang="ja-JP" altLang="en-US"/>
           </a:p>
@@ -1830,7 +1830,7 @@
           <a:p>
             <a:fld id="{67CFB89A-092E-4A9F-99E5-8971A5611650}" type="datetimeFigureOut">
               <a:rPr kumimoji="1" lang="ja-JP" altLang="en-US" smtClean="0"/>
-              <a:t>2026/1/19</a:t>
+              <a:t>2026/1/20</a:t>
             </a:fld>
             <a:endParaRPr kumimoji="1" lang="ja-JP" altLang="en-US"/>
           </a:p>
@@ -1948,7 +1948,7 @@
           <a:p>
             <a:fld id="{67CFB89A-092E-4A9F-99E5-8971A5611650}" type="datetimeFigureOut">
               <a:rPr kumimoji="1" lang="ja-JP" altLang="en-US" smtClean="0"/>
-              <a:t>2026/1/19</a:t>
+              <a:t>2026/1/20</a:t>
             </a:fld>
             <a:endParaRPr kumimoji="1" lang="ja-JP" altLang="en-US"/>
           </a:p>
@@ -2043,7 +2043,7 @@
           <a:p>
             <a:fld id="{67CFB89A-092E-4A9F-99E5-8971A5611650}" type="datetimeFigureOut">
               <a:rPr kumimoji="1" lang="ja-JP" altLang="en-US" smtClean="0"/>
-              <a:t>2026/1/19</a:t>
+              <a:t>2026/1/20</a:t>
             </a:fld>
             <a:endParaRPr kumimoji="1" lang="ja-JP" altLang="en-US"/>
           </a:p>
@@ -2352,7 +2352,7 @@
           <a:p>
             <a:fld id="{67CFB89A-092E-4A9F-99E5-8971A5611650}" type="datetimeFigureOut">
               <a:rPr kumimoji="1" lang="ja-JP" altLang="en-US" smtClean="0"/>
-              <a:t>2026/1/19</a:t>
+              <a:t>2026/1/20</a:t>
             </a:fld>
             <a:endParaRPr kumimoji="1" lang="ja-JP" altLang="en-US"/>
           </a:p>
@@ -2609,7 +2609,7 @@
           <a:p>
             <a:fld id="{67CFB89A-092E-4A9F-99E5-8971A5611650}" type="datetimeFigureOut">
               <a:rPr kumimoji="1" lang="ja-JP" altLang="en-US" smtClean="0"/>
-              <a:t>2026/1/19</a:t>
+              <a:t>2026/1/20</a:t>
             </a:fld>
             <a:endParaRPr kumimoji="1" lang="ja-JP" altLang="en-US"/>
           </a:p>
@@ -2854,7 +2854,7 @@
           <a:p>
             <a:fld id="{67CFB89A-092E-4A9F-99E5-8971A5611650}" type="datetimeFigureOut">
               <a:rPr kumimoji="1" lang="ja-JP" altLang="en-US" smtClean="0"/>
-              <a:t>2026/1/19</a:t>
+              <a:t>2026/1/20</a:t>
             </a:fld>
             <a:endParaRPr kumimoji="1" lang="ja-JP" altLang="en-US"/>
           </a:p>
@@ -3281,8 +3281,8 @@
           </a:prstGeom>
           <a:solidFill>
             <a:schemeClr val="accent3">
-              <a:lumMod val="60000"/>
-              <a:lumOff val="40000"/>
+              <a:lumMod val="40000"/>
+              <a:lumOff val="60000"/>
             </a:schemeClr>
           </a:solidFill>
         </p:spPr>
@@ -3348,8 +3348,8 @@
         </p:blipFill>
         <p:spPr>
           <a:xfrm>
-            <a:off x="2940583" y="177603"/>
-            <a:ext cx="4235116" cy="2338091"/>
+            <a:off x="3131082" y="168501"/>
+            <a:ext cx="4425417" cy="2345755"/>
           </a:xfrm>
           <a:prstGeom prst="rect">
             <a:avLst/>
@@ -3370,7 +3370,7 @@
         </p:nvSpPr>
         <p:spPr>
           <a:xfrm rot="780986">
-            <a:off x="5525964" y="399184"/>
+            <a:off x="5525963" y="468836"/>
             <a:ext cx="4300105" cy="1200329"/>
           </a:xfrm>
           <a:prstGeom prst="rect">
@@ -3387,6 +3387,11 @@
             <a:pPr algn="ctr"/>
             <a:r>
               <a:rPr kumimoji="1" lang="ja-JP" altLang="en-US" sz="3600" b="1" i="1" dirty="0">
+                <a:ln w="19050">
+                  <a:solidFill>
+                    <a:schemeClr val="tx1"/>
+                  </a:solidFill>
+                </a:ln>
                 <a:solidFill>
                   <a:srgbClr val="FF0000"/>
                 </a:solidFill>
@@ -3394,6 +3399,11 @@
               <a:t>敵を退けて</a:t>
             </a:r>
             <a:endParaRPr kumimoji="1" lang="en-US" altLang="ja-JP" sz="3600" b="1" i="1" dirty="0">
+              <a:ln w="19050">
+                <a:solidFill>
+                  <a:schemeClr val="tx1"/>
+                </a:solidFill>
+              </a:ln>
               <a:solidFill>
                 <a:srgbClr val="FF0000"/>
               </a:solidFill>
@@ -3403,6 +3413,11 @@
             <a:pPr algn="ctr"/>
             <a:r>
               <a:rPr kumimoji="1" lang="ja-JP" altLang="en-US" sz="3600" b="1" i="1" dirty="0">
+                <a:ln w="19050">
+                  <a:solidFill>
+                    <a:schemeClr val="tx1"/>
+                  </a:solidFill>
+                </a:ln>
                 <a:solidFill>
                   <a:srgbClr val="FF0000"/>
                 </a:solidFill>
@@ -3426,7 +3441,7 @@
         </p:nvSpPr>
         <p:spPr>
           <a:xfrm>
-            <a:off x="204961" y="3525144"/>
+            <a:off x="204961" y="3404174"/>
             <a:ext cx="4644609" cy="792525"/>
           </a:xfrm>
           <a:prstGeom prst="rect">
@@ -3435,7 +3450,9 @@
           <a:noFill/>
           <a:ln w="38100">
             <a:solidFill>
-              <a:srgbClr val="00B050"/>
+              <a:schemeClr val="accent6">
+                <a:lumMod val="50000"/>
+              </a:schemeClr>
             </a:solidFill>
           </a:ln>
         </p:spPr>
@@ -3503,10 +3520,10 @@
         </p:nvGrpSpPr>
         <p:grpSpPr>
           <a:xfrm>
-            <a:off x="81395" y="4437247"/>
-            <a:ext cx="3946530" cy="2249446"/>
+            <a:off x="71870" y="4400992"/>
+            <a:ext cx="3962551" cy="2249446"/>
             <a:chOff x="-2704" y="3273656"/>
-            <a:chExt cx="4405368" cy="3413037"/>
+            <a:chExt cx="4423252" cy="3413037"/>
           </a:xfrm>
         </p:grpSpPr>
         <p:sp>
@@ -3570,10 +3587,10 @@
           </p:nvGrpSpPr>
           <p:grpSpPr>
             <a:xfrm>
-              <a:off x="334959" y="4201268"/>
-              <a:ext cx="1366985" cy="766401"/>
-              <a:chOff x="110833" y="4003639"/>
-              <a:chExt cx="2013527" cy="1214689"/>
+              <a:off x="379005" y="3927468"/>
+              <a:ext cx="1256503" cy="1040202"/>
+              <a:chOff x="175711" y="3569685"/>
+              <a:chExt cx="1850791" cy="1648643"/>
             </a:xfrm>
           </p:grpSpPr>
           <p:sp>
@@ -3590,8 +3607,8 @@
             </p:nvSpPr>
             <p:spPr>
               <a:xfrm>
-                <a:off x="812797" y="4003639"/>
-                <a:ext cx="581891" cy="544945"/>
+                <a:off x="812350" y="3569685"/>
+                <a:ext cx="581892" cy="804974"/>
               </a:xfrm>
               <a:prstGeom prst="rect">
                 <a:avLst/>
@@ -3654,8 +3671,8 @@
             </p:nvSpPr>
             <p:spPr>
               <a:xfrm>
-                <a:off x="812798" y="4673383"/>
-                <a:ext cx="581891" cy="544945"/>
+                <a:off x="812797" y="4433535"/>
+                <a:ext cx="581892" cy="784793"/>
               </a:xfrm>
               <a:prstGeom prst="rect">
                 <a:avLst/>
@@ -3718,8 +3735,8 @@
             </p:nvSpPr>
             <p:spPr>
               <a:xfrm>
-                <a:off x="110833" y="4673383"/>
-                <a:ext cx="581891" cy="544945"/>
+                <a:off x="175711" y="4433535"/>
+                <a:ext cx="581892" cy="784793"/>
               </a:xfrm>
               <a:prstGeom prst="rect">
                 <a:avLst/>
@@ -3782,8 +3799,8 @@
             </p:nvSpPr>
             <p:spPr>
               <a:xfrm>
-                <a:off x="1542469" y="4673382"/>
-                <a:ext cx="581891" cy="544945"/>
+                <a:off x="1444610" y="4425902"/>
+                <a:ext cx="581892" cy="784793"/>
               </a:xfrm>
               <a:prstGeom prst="rect">
                 <a:avLst/>
@@ -3917,8 +3934,8 @@
           </p:nvSpPr>
           <p:spPr>
             <a:xfrm>
-              <a:off x="414525" y="5259309"/>
-              <a:ext cx="1189041" cy="343830"/>
+              <a:off x="409182" y="5127079"/>
+              <a:ext cx="1189041" cy="482381"/>
             </a:xfrm>
             <a:prstGeom prst="rect">
               <a:avLst/>
@@ -3981,8 +3998,8 @@
           </p:nvSpPr>
           <p:spPr>
             <a:xfrm>
-              <a:off x="1754570" y="5259309"/>
-              <a:ext cx="2619202" cy="369332"/>
+              <a:off x="1783461" y="5095422"/>
+              <a:ext cx="2619202" cy="369331"/>
             </a:xfrm>
             <a:prstGeom prst="rect">
               <a:avLst/>
@@ -4297,8 +4314,8 @@
           </p:nvSpPr>
           <p:spPr>
             <a:xfrm>
-              <a:off x="1711112" y="5973001"/>
-              <a:ext cx="2619202" cy="369332"/>
+              <a:off x="1801346" y="5778500"/>
+              <a:ext cx="2619202" cy="369331"/>
             </a:xfrm>
             <a:prstGeom prst="rect">
               <a:avLst/>
@@ -4377,7 +4394,7 @@
         </p:nvSpPr>
         <p:spPr>
           <a:xfrm>
-            <a:off x="204961" y="3042332"/>
+            <a:off x="204961" y="2921362"/>
             <a:ext cx="2548447" cy="369332"/>
           </a:xfrm>
           <a:prstGeom prst="rect">
@@ -4436,7 +4453,7 @@
         </p:nvSpPr>
         <p:spPr>
           <a:xfrm>
-            <a:off x="4350288" y="5327119"/>
+            <a:off x="4551227" y="5385235"/>
             <a:ext cx="4944549" cy="792525"/>
           </a:xfrm>
           <a:prstGeom prst="rect">
@@ -4471,15 +4488,31 @@
           <a:p>
             <a:r>
               <a:rPr kumimoji="1" lang="ja-JP" altLang="en-US" sz="2275" dirty="0" smtClean="0"/>
-              <a:t>敵の攻撃を</a:t>
+              <a:t>敵の攻撃</a:t>
+            </a:r>
+            <a:r>
+              <a:rPr kumimoji="1" lang="ja-JP" altLang="en-US" sz="2275" dirty="0" smtClean="0"/>
+              <a:t>を</a:t>
             </a:r>
             <a:r>
               <a:rPr kumimoji="1" lang="ja-JP" altLang="en-US" sz="2275" u="sng" dirty="0" smtClean="0"/>
-              <a:t>なるべく受けずに攻撃する</a:t>
+              <a:t>なるべく受けず</a:t>
+            </a:r>
+            <a:r>
+              <a:rPr kumimoji="1" lang="ja-JP" altLang="en-US" sz="2275" u="sng" dirty="0" smtClean="0"/>
+              <a:t>に</a:t>
+            </a:r>
+            <a:r>
+              <a:rPr kumimoji="1" lang="ja-JP" altLang="en-US" sz="2275" u="sng" dirty="0" smtClean="0"/>
+              <a:t>攻撃する</a:t>
             </a:r>
             <a:r>
               <a:rPr kumimoji="1" lang="ja-JP" altLang="en-US" sz="2275" dirty="0" smtClean="0"/>
-              <a:t>のが攻略の鍵だ。</a:t>
+              <a:t>のが</a:t>
+            </a:r>
+            <a:r>
+              <a:rPr kumimoji="1" lang="ja-JP" altLang="en-US" sz="2275" dirty="0" smtClean="0"/>
+              <a:t>攻略の鍵だ。</a:t>
             </a:r>
             <a:endParaRPr kumimoji="1" lang="en-US" altLang="ja-JP" sz="2275" dirty="0"/>
           </a:p>
@@ -4495,6 +4528,13 @@
   <p:clrMapOvr>
     <a:masterClrMapping/>
   </p:clrMapOvr>
+  <p:timing>
+    <p:tnLst>
+      <p:par>
+        <p:cTn id="1" dur="indefinite" restart="never" nodeType="tmRoot"/>
+      </p:par>
+    </p:tnLst>
+  </p:timing>
 </p:sld>
 </file>
 

--- a/BackToHome_ポスター.pptx
+++ b/BackToHome_ポスター.pptx
@@ -243,7 +243,7 @@
           <a:p>
             <a:fld id="{67CFB89A-092E-4A9F-99E5-8971A5611650}" type="datetimeFigureOut">
               <a:rPr kumimoji="1" lang="ja-JP" altLang="en-US" smtClean="0"/>
-              <a:t>2026/1/20</a:t>
+              <a:t>2026/1/26</a:t>
             </a:fld>
             <a:endParaRPr kumimoji="1" lang="ja-JP" altLang="en-US"/>
           </a:p>
@@ -445,7 +445,7 @@
           <a:p>
             <a:fld id="{67CFB89A-092E-4A9F-99E5-8971A5611650}" type="datetimeFigureOut">
               <a:rPr kumimoji="1" lang="ja-JP" altLang="en-US" smtClean="0"/>
-              <a:t>2026/1/20</a:t>
+              <a:t>2026/1/26</a:t>
             </a:fld>
             <a:endParaRPr kumimoji="1" lang="ja-JP" altLang="en-US"/>
           </a:p>
@@ -657,7 +657,7 @@
           <a:p>
             <a:fld id="{67CFB89A-092E-4A9F-99E5-8971A5611650}" type="datetimeFigureOut">
               <a:rPr kumimoji="1" lang="ja-JP" altLang="en-US" smtClean="0"/>
-              <a:t>2026/1/20</a:t>
+              <a:t>2026/1/26</a:t>
             </a:fld>
             <a:endParaRPr kumimoji="1" lang="ja-JP" altLang="en-US"/>
           </a:p>
@@ -859,7 +859,7 @@
           <a:p>
             <a:fld id="{67CFB89A-092E-4A9F-99E5-8971A5611650}" type="datetimeFigureOut">
               <a:rPr kumimoji="1" lang="ja-JP" altLang="en-US" smtClean="0"/>
-              <a:t>2026/1/20</a:t>
+              <a:t>2026/1/26</a:t>
             </a:fld>
             <a:endParaRPr kumimoji="1" lang="ja-JP" altLang="en-US"/>
           </a:p>
@@ -1103,7 +1103,7 @@
           <a:p>
             <a:fld id="{67CFB89A-092E-4A9F-99E5-8971A5611650}" type="datetimeFigureOut">
               <a:rPr kumimoji="1" lang="ja-JP" altLang="en-US" smtClean="0"/>
-              <a:t>2026/1/20</a:t>
+              <a:t>2026/1/26</a:t>
             </a:fld>
             <a:endParaRPr kumimoji="1" lang="ja-JP" altLang="en-US"/>
           </a:p>
@@ -1399,7 +1399,7 @@
           <a:p>
             <a:fld id="{67CFB89A-092E-4A9F-99E5-8971A5611650}" type="datetimeFigureOut">
               <a:rPr kumimoji="1" lang="ja-JP" altLang="en-US" smtClean="0"/>
-              <a:t>2026/1/20</a:t>
+              <a:t>2026/1/26</a:t>
             </a:fld>
             <a:endParaRPr kumimoji="1" lang="ja-JP" altLang="en-US"/>
           </a:p>
@@ -1830,7 +1830,7 @@
           <a:p>
             <a:fld id="{67CFB89A-092E-4A9F-99E5-8971A5611650}" type="datetimeFigureOut">
               <a:rPr kumimoji="1" lang="ja-JP" altLang="en-US" smtClean="0"/>
-              <a:t>2026/1/20</a:t>
+              <a:t>2026/1/26</a:t>
             </a:fld>
             <a:endParaRPr kumimoji="1" lang="ja-JP" altLang="en-US"/>
           </a:p>
@@ -1948,7 +1948,7 @@
           <a:p>
             <a:fld id="{67CFB89A-092E-4A9F-99E5-8971A5611650}" type="datetimeFigureOut">
               <a:rPr kumimoji="1" lang="ja-JP" altLang="en-US" smtClean="0"/>
-              <a:t>2026/1/20</a:t>
+              <a:t>2026/1/26</a:t>
             </a:fld>
             <a:endParaRPr kumimoji="1" lang="ja-JP" altLang="en-US"/>
           </a:p>
@@ -2043,7 +2043,7 @@
           <a:p>
             <a:fld id="{67CFB89A-092E-4A9F-99E5-8971A5611650}" type="datetimeFigureOut">
               <a:rPr kumimoji="1" lang="ja-JP" altLang="en-US" smtClean="0"/>
-              <a:t>2026/1/20</a:t>
+              <a:t>2026/1/26</a:t>
             </a:fld>
             <a:endParaRPr kumimoji="1" lang="ja-JP" altLang="en-US"/>
           </a:p>
@@ -2352,7 +2352,7 @@
           <a:p>
             <a:fld id="{67CFB89A-092E-4A9F-99E5-8971A5611650}" type="datetimeFigureOut">
               <a:rPr kumimoji="1" lang="ja-JP" altLang="en-US" smtClean="0"/>
-              <a:t>2026/1/20</a:t>
+              <a:t>2026/1/26</a:t>
             </a:fld>
             <a:endParaRPr kumimoji="1" lang="ja-JP" altLang="en-US"/>
           </a:p>
@@ -2609,7 +2609,7 @@
           <a:p>
             <a:fld id="{67CFB89A-092E-4A9F-99E5-8971A5611650}" type="datetimeFigureOut">
               <a:rPr kumimoji="1" lang="ja-JP" altLang="en-US" smtClean="0"/>
-              <a:t>2026/1/20</a:t>
+              <a:t>2026/1/26</a:t>
             </a:fld>
             <a:endParaRPr kumimoji="1" lang="ja-JP" altLang="en-US"/>
           </a:p>
@@ -2854,7 +2854,7 @@
           <a:p>
             <a:fld id="{67CFB89A-092E-4A9F-99E5-8971A5611650}" type="datetimeFigureOut">
               <a:rPr kumimoji="1" lang="ja-JP" altLang="en-US" smtClean="0"/>
-              <a:t>2026/1/20</a:t>
+              <a:t>2026/1/26</a:t>
             </a:fld>
             <a:endParaRPr kumimoji="1" lang="ja-JP" altLang="en-US"/>
           </a:p>
@@ -3273,7 +3273,7 @@
         </p:nvSpPr>
         <p:spPr>
           <a:xfrm>
-            <a:off x="204961" y="171307"/>
+            <a:off x="195436" y="171307"/>
             <a:ext cx="2297607" cy="2342949"/>
           </a:xfrm>
           <a:prstGeom prst="rect">
@@ -3370,7 +3370,7 @@
         </p:nvSpPr>
         <p:spPr>
           <a:xfrm rot="780986">
-            <a:off x="5525963" y="468836"/>
+            <a:off x="5115740" y="637337"/>
             <a:ext cx="4300105" cy="1200329"/>
           </a:xfrm>
           <a:prstGeom prst="rect">
@@ -3450,9 +3450,7 @@
           <a:noFill/>
           <a:ln w="38100">
             <a:solidFill>
-              <a:schemeClr val="accent6">
-                <a:lumMod val="50000"/>
-              </a:schemeClr>
+              <a:srgbClr val="00B050"/>
             </a:solidFill>
           </a:ln>
         </p:spPr>
@@ -4395,7 +4393,7 @@
         <p:spPr>
           <a:xfrm>
             <a:off x="204961" y="2921362"/>
-            <a:ext cx="2548447" cy="369332"/>
+            <a:ext cx="2548447" cy="461665"/>
           </a:xfrm>
           <a:prstGeom prst="rect">
             <a:avLst/>
@@ -4409,7 +4407,7 @@
           <a:lstStyle/>
           <a:p>
             <a:r>
-              <a:rPr kumimoji="1" lang="ja-JP" altLang="en-US" b="1" dirty="0"/>
+              <a:rPr kumimoji="1" lang="ja-JP" altLang="en-US" sz="2400" b="1" dirty="0"/>
               <a:t>・ゲームの目的</a:t>
             </a:r>
           </a:p>
@@ -4453,8 +4451,8 @@
         </p:nvSpPr>
         <p:spPr>
           <a:xfrm>
-            <a:off x="4551227" y="5385235"/>
-            <a:ext cx="4944549" cy="792525"/>
+            <a:off x="4461353" y="5385235"/>
+            <a:ext cx="5160664" cy="792525"/>
           </a:xfrm>
           <a:prstGeom prst="rect">
             <a:avLst/>
@@ -4488,31 +4486,19 @@
           <a:p>
             <a:r>
               <a:rPr kumimoji="1" lang="ja-JP" altLang="en-US" sz="2275" dirty="0" smtClean="0"/>
-              <a:t>敵の攻撃</a:t>
+              <a:t>ステータスの上げ方によっては</a:t>
+            </a:r>
+            <a:r>
+              <a:rPr kumimoji="1" lang="ja-JP" altLang="en-US" sz="2275" b="1" dirty="0" smtClean="0">
+                <a:solidFill>
+                  <a:srgbClr val="FF0000"/>
+                </a:solidFill>
+              </a:rPr>
+              <a:t>ボスを一撃で倒す</a:t>
             </a:r>
             <a:r>
               <a:rPr kumimoji="1" lang="ja-JP" altLang="en-US" sz="2275" dirty="0" smtClean="0"/>
-              <a:t>を</a:t>
-            </a:r>
-            <a:r>
-              <a:rPr kumimoji="1" lang="ja-JP" altLang="en-US" sz="2275" u="sng" dirty="0" smtClean="0"/>
-              <a:t>なるべく受けず</a:t>
-            </a:r>
-            <a:r>
-              <a:rPr kumimoji="1" lang="ja-JP" altLang="en-US" sz="2275" u="sng" dirty="0" smtClean="0"/>
-              <a:t>に</a:t>
-            </a:r>
-            <a:r>
-              <a:rPr kumimoji="1" lang="ja-JP" altLang="en-US" sz="2275" u="sng" dirty="0" smtClean="0"/>
-              <a:t>攻撃する</a:t>
-            </a:r>
-            <a:r>
-              <a:rPr kumimoji="1" lang="ja-JP" altLang="en-US" sz="2275" dirty="0" smtClean="0"/>
-              <a:t>のが</a:t>
-            </a:r>
-            <a:r>
-              <a:rPr kumimoji="1" lang="ja-JP" altLang="en-US" sz="2275" dirty="0" smtClean="0"/>
-              <a:t>攻略の鍵だ。</a:t>
+              <a:t>ことも可能。</a:t>
             </a:r>
             <a:endParaRPr kumimoji="1" lang="en-US" altLang="ja-JP" sz="2275" dirty="0"/>
           </a:p>
